--- a/C#Files/CSharpAssessmentWithAnswers - more.pptx
+++ b/C#Files/CSharpAssessmentWithAnswers - more.pptx
@@ -128,7 +128,41 @@
       </a:defRPr>
     </a:lvl9pPr>
   </p:defaultTextStyle>
+  <p:extLst>
+    <p:ext uri="{EFAFB233-063F-42B5-8137-9DF3F51BA10A}">
+      <p15:sldGuideLst xmlns:p15="http://schemas.microsoft.com/office/powerpoint/2012/main"/>
+    </p:ext>
+  </p:extLst>
 </p:presentation>
+</file>
+
+<file path=ppt/changesInfos/changesInfo1.xml><?xml version="1.0" encoding="utf-8"?>
+<pc:chgInfo xmlns:a="http://schemas.openxmlformats.org/drawingml/2006/main" xmlns:r="http://schemas.openxmlformats.org/officeDocument/2006/relationships" xmlns:ac="http://schemas.microsoft.com/office/drawing/2013/main/command" xmlns:pc="http://schemas.microsoft.com/office/powerpoint/2013/main/command">
+  <pc:docChgLst>
+    <pc:chgData name="Daniela Trapani" userId="30b41bef89cfceee" providerId="LiveId" clId="{ADEB5723-9D39-45AE-898F-3FDA33EC1B39}"/>
+    <pc:docChg chg="modSld">
+      <pc:chgData name="Daniela Trapani" userId="30b41bef89cfceee" providerId="LiveId" clId="{ADEB5723-9D39-45AE-898F-3FDA33EC1B39}" dt="2026-06-26T12:49:08.891" v="9" actId="20577"/>
+      <pc:docMkLst>
+        <pc:docMk/>
+      </pc:docMkLst>
+      <pc:sldChg chg="modSp mod">
+        <pc:chgData name="Daniela Trapani" userId="30b41bef89cfceee" providerId="LiveId" clId="{ADEB5723-9D39-45AE-898F-3FDA33EC1B39}" dt="2026-06-26T12:49:08.891" v="9" actId="20577"/>
+        <pc:sldMkLst>
+          <pc:docMk/>
+          <pc:sldMk cId="0" sldId="277"/>
+        </pc:sldMkLst>
+        <pc:spChg chg="mod">
+          <ac:chgData name="Daniela Trapani" userId="30b41bef89cfceee" providerId="LiveId" clId="{ADEB5723-9D39-45AE-898F-3FDA33EC1B39}" dt="2026-06-26T12:49:08.891" v="9" actId="20577"/>
+          <ac:spMkLst>
+            <pc:docMk/>
+            <pc:sldMk cId="0" sldId="277"/>
+            <ac:spMk id="6" creationId="{00000000-0000-0000-0000-000000000000}"/>
+          </ac:spMkLst>
+        </pc:spChg>
+      </pc:sldChg>
+    </pc:docChg>
+  </pc:docChgLst>
+</pc:chgInfo>
 </file>
 
 <file path=ppt/notesMasters/notesMaster1.xml><?xml version="1.0" encoding="utf-8"?>
@@ -213,7 +247,7 @@
           <a:p>
             <a:fld id="{5282F153-3F37-0F45-9E97-73ACFA13230C}" type="datetimeFigureOut">
               <a:rPr lang="en-US"/>
-              <a:t>6/25/2026</a:t>
+              <a:t>6/26/2026</a:t>
             </a:fld>
             <a:endParaRPr lang="en-US"/>
           </a:p>
@@ -11855,7 +11889,7 @@
               <a:buNone/>
             </a:pPr>
             <a:r>
-              <a:rPr lang="en-US" sz="2100" b="1">
+              <a:rPr lang="en-US" sz="2100" b="1" dirty="0">
                 <a:solidFill>
                   <a:srgbClr val="16335B"/>
                 </a:solidFill>
@@ -11863,21 +11897,10 @@
                 <a:ea typeface="Segoe UI" pitchFamily="34" charset="-122"/>
                 <a:cs typeface="Segoe UI" pitchFamily="34" charset="-120"/>
               </a:rPr>
-              <a:t>In </a:t>
+              <a:t>In a </a:t>
             </a:r>
             <a:r>
               <a:rPr lang="en-US" sz="2100" b="1" dirty="0">
-                <a:solidFill>
-                  <a:srgbClr val="16335B"/>
-                </a:solidFill>
-                <a:latin typeface="Segoe UI" pitchFamily="34" charset="0"/>
-                <a:ea typeface="Segoe UI" pitchFamily="34" charset="-122"/>
-                <a:cs typeface="Segoe UI" pitchFamily="34" charset="-120"/>
-              </a:rPr>
-              <a:t>a </a:t>
-            </a:r>
-            <a:r>
-              <a:rPr lang="en-US" sz="2100" b="1">
                 <a:solidFill>
                   <a:srgbClr val="0E8C82"/>
                 </a:solidFill>
@@ -11885,10 +11908,10 @@
                 <a:ea typeface="Consolas" pitchFamily="34" charset="-122"/>
                 <a:cs typeface="Consolas" pitchFamily="34" charset="-120"/>
               </a:rPr>
-              <a:t>SortedList&lt;string, int&gt;</a:t>
-            </a:r>
-            <a:r>
-              <a:rPr lang="en-US" sz="2100" b="1">
+              <a:t>Dictionary&lt;string, int&gt;</a:t>
+            </a:r>
+            <a:r>
+              <a:rPr lang="en-US" sz="2100" b="1" dirty="0">
                 <a:solidFill>
                   <a:srgbClr val="16335B"/>
                 </a:solidFill>
@@ -11896,29 +11919,7 @@
                 <a:ea typeface="Segoe UI" pitchFamily="34" charset="-122"/>
                 <a:cs typeface="Segoe UI" pitchFamily="34" charset="-120"/>
               </a:rPr>
-              <a:t>, what kind of data is stored </a:t>
-            </a:r>
-            <a:r>
-              <a:rPr lang="en-US" sz="2100" b="1" dirty="0">
-                <a:solidFill>
-                  <a:srgbClr val="16335B"/>
-                </a:solidFill>
-                <a:latin typeface="Segoe UI" pitchFamily="34" charset="0"/>
-                <a:ea typeface="Segoe UI" pitchFamily="34" charset="-122"/>
-                <a:cs typeface="Segoe UI" pitchFamily="34" charset="-120"/>
-              </a:rPr>
-              <a:t>as </a:t>
-            </a:r>
-            <a:r>
-              <a:rPr lang="en-US" sz="2100" b="1">
-                <a:solidFill>
-                  <a:srgbClr val="16335B"/>
-                </a:solidFill>
-                <a:latin typeface="Segoe UI" pitchFamily="34" charset="0"/>
-                <a:ea typeface="Segoe UI" pitchFamily="34" charset="-122"/>
-                <a:cs typeface="Segoe UI" pitchFamily="34" charset="-120"/>
-              </a:rPr>
-              <a:t>the value (not the key)?</a:t>
+              <a:t>, what kind of data is stored as the value (not the key)?</a:t>
             </a:r>
             <a:endParaRPr lang="en-US" sz="2100" dirty="0"/>
           </a:p>

--- a/C#Files/CSharpAssessmentWithAnswers - more.pptx
+++ b/C#Files/CSharpAssessmentWithAnswers - more.pptx
@@ -141,7 +141,7 @@
   <pc:docChgLst>
     <pc:chgData name="Daniela Trapani" userId="30b41bef89cfceee" providerId="LiveId" clId="{ADEB5723-9D39-45AE-898F-3FDA33EC1B39}"/>
     <pc:docChg chg="modSld">
-      <pc:chgData name="Daniela Trapani" userId="30b41bef89cfceee" providerId="LiveId" clId="{ADEB5723-9D39-45AE-898F-3FDA33EC1B39}" dt="2026-06-26T12:49:08.891" v="9" actId="20577"/>
+      <pc:chgData name="Daniela Trapani" userId="30b41bef89cfceee" providerId="LiveId" clId="{ADEB5723-9D39-45AE-898F-3FDA33EC1B39}" dt="2026-06-26T12:51:04.050" v="19" actId="20577"/>
       <pc:docMkLst>
         <pc:docMk/>
       </pc:docMkLst>
@@ -157,6 +157,21 @@
             <pc:docMk/>
             <pc:sldMk cId="0" sldId="277"/>
             <ac:spMk id="6" creationId="{00000000-0000-0000-0000-000000000000}"/>
+          </ac:spMkLst>
+        </pc:spChg>
+      </pc:sldChg>
+      <pc:sldChg chg="modSp mod">
+        <pc:chgData name="Daniela Trapani" userId="30b41bef89cfceee" providerId="LiveId" clId="{ADEB5723-9D39-45AE-898F-3FDA33EC1B39}" dt="2026-06-26T12:51:04.050" v="19" actId="20577"/>
+        <pc:sldMkLst>
+          <pc:docMk/>
+          <pc:sldMk cId="0" sldId="278"/>
+        </pc:sldMkLst>
+        <pc:spChg chg="mod">
+          <ac:chgData name="Daniela Trapani" userId="30b41bef89cfceee" providerId="LiveId" clId="{ADEB5723-9D39-45AE-898F-3FDA33EC1B39}" dt="2026-06-26T12:51:04.050" v="19" actId="20577"/>
+          <ac:spMkLst>
+            <pc:docMk/>
+            <pc:sldMk cId="0" sldId="278"/>
+            <ac:spMk id="8" creationId="{00000000-0000-0000-0000-000000000000}"/>
           </ac:spMkLst>
         </pc:spChg>
       </pc:sldChg>
@@ -12512,7 +12527,7 @@
               <a:buNone/>
             </a:pPr>
             <a:r>
-              <a:rPr lang="en-US" sz="2100" b="1">
+              <a:rPr lang="en-US" sz="2100" b="1" dirty="0">
                 <a:solidFill>
                   <a:srgbClr val="16335B"/>
                 </a:solidFill>
@@ -12520,21 +12535,10 @@
                 <a:ea typeface="Segoe UI" pitchFamily="34" charset="-122"/>
                 <a:cs typeface="Segoe UI" pitchFamily="34" charset="-120"/>
               </a:rPr>
-              <a:t>In </a:t>
+              <a:t>In a </a:t>
             </a:r>
             <a:r>
               <a:rPr lang="en-US" sz="2100" b="1" dirty="0">
-                <a:solidFill>
-                  <a:srgbClr val="16335B"/>
-                </a:solidFill>
-                <a:latin typeface="Segoe UI" pitchFamily="34" charset="0"/>
-                <a:ea typeface="Segoe UI" pitchFamily="34" charset="-122"/>
-                <a:cs typeface="Segoe UI" pitchFamily="34" charset="-120"/>
-              </a:rPr>
-              <a:t>a </a:t>
-            </a:r>
-            <a:r>
-              <a:rPr lang="en-US" sz="2100" b="1">
                 <a:solidFill>
                   <a:srgbClr val="0E8C82"/>
                 </a:solidFill>
@@ -12542,10 +12546,10 @@
                 <a:ea typeface="Consolas" pitchFamily="34" charset="-122"/>
                 <a:cs typeface="Consolas" pitchFamily="34" charset="-120"/>
               </a:rPr>
-              <a:t>SortedList&lt;string, int&gt;</a:t>
-            </a:r>
-            <a:r>
-              <a:rPr lang="en-US" sz="2100" b="1">
+              <a:t>Dictionary&lt;string, int&gt;</a:t>
+            </a:r>
+            <a:r>
+              <a:rPr lang="en-US" sz="2100" b="1" dirty="0">
                 <a:solidFill>
                   <a:srgbClr val="16335B"/>
                 </a:solidFill>
@@ -12553,29 +12557,7 @@
                 <a:ea typeface="Segoe UI" pitchFamily="34" charset="-122"/>
                 <a:cs typeface="Segoe UI" pitchFamily="34" charset="-120"/>
               </a:rPr>
-              <a:t>, what kind of data is stored </a:t>
-            </a:r>
-            <a:r>
-              <a:rPr lang="en-US" sz="2100" b="1" dirty="0">
-                <a:solidFill>
-                  <a:srgbClr val="16335B"/>
-                </a:solidFill>
-                <a:latin typeface="Segoe UI" pitchFamily="34" charset="0"/>
-                <a:ea typeface="Segoe UI" pitchFamily="34" charset="-122"/>
-                <a:cs typeface="Segoe UI" pitchFamily="34" charset="-120"/>
-              </a:rPr>
-              <a:t>as </a:t>
-            </a:r>
-            <a:r>
-              <a:rPr lang="en-US" sz="2100" b="1">
-                <a:solidFill>
-                  <a:srgbClr val="16335B"/>
-                </a:solidFill>
-                <a:latin typeface="Segoe UI" pitchFamily="34" charset="0"/>
-                <a:ea typeface="Segoe UI" pitchFamily="34" charset="-122"/>
-                <a:cs typeface="Segoe UI" pitchFamily="34" charset="-120"/>
-              </a:rPr>
-              <a:t>the value (not the key)?</a:t>
+              <a:t>, what kind of data is stored as the value (not the key)?</a:t>
             </a:r>
             <a:endParaRPr lang="en-US" sz="2100" dirty="0"/>
           </a:p>
